--- a/NeuroAgent_Presentation.pptx
+++ b/NeuroAgent_Presentation.pptx
@@ -4,6 +4,9 @@
   <p:sldMasterIdLst>
     <p:sldMasterId id="2147483648" r:id="rId1"/>
   </p:sldMasterIdLst>
+  <p:notesMasterIdLst>
+    <p:notesMasterId r:id="rId12"/>
+  </p:notesMasterIdLst>
   <p:sldIdLst>
     <p:sldId id="256" r:id="rId2"/>
     <p:sldId id="257" r:id="rId3"/>
@@ -16,9 +19,6 @@
     <p:sldId id="264" r:id="rId10"/>
     <p:sldId id="265" r:id="rId11"/>
   </p:sldIdLst>
-  <p:notesMasterIdLst>
-    <p:notesMasterId r:id="rId12"/>
-  </p:notesMasterIdLst>
   <p:sldSz cx="12192000" cy="6858000"/>
   <p:notesSz cx="6858000" cy="12192000"/>
   <p:defaultTextStyle>
@@ -113,7 +113,20 @@
       </a:defRPr>
     </a:lvl9pPr>
   </p:defaultTextStyle>
+  <p:extLst>
+    <p:ext uri="{EFAFB233-063F-42B5-8137-9DF3F51BA10A}">
+      <p15:sldGuideLst xmlns:p15="http://schemas.microsoft.com/office/powerpoint/2012/main"/>
+    </p:ext>
+  </p:extLst>
 </p:presentation>
+</file>
+
+<file path=ppt/revisionInfo.xml><?xml version="1.0" encoding="utf-8"?>
+<p1510:revInfo xmlns:a="http://schemas.openxmlformats.org/drawingml/2006/main" xmlns:r="http://schemas.openxmlformats.org/officeDocument/2006/relationships" xmlns:p1510="http://schemas.microsoft.com/office/powerpoint/2015/10/main">
+  <p1510:revLst>
+    <p1510:client id="{74BC5722-0E6E-542C-0713-6C2BF600BF49}" v="64" dt="2026-08-03T00:11:50.821"/>
+  </p1510:revLst>
+</p1510:revInfo>
 </file>
 
 <file path=ppt/notesMasters/notesMaster1.xml><?xml version="1.0" encoding="utf-8"?>
@@ -151,7 +164,7 @@
         <p:spPr>
           <a:xfrm>
             <a:off x="0" y="0"/>
-            <a:ext cx="2971800" cy="458788"/>
+            <a:ext cx="2971800" cy="611188"/>
           </a:xfrm>
           <a:prstGeom prst="rect">
             <a:avLst/>
@@ -182,7 +195,7 @@
         <p:spPr>
           <a:xfrm>
             <a:off x="3884613" y="0"/>
-            <a:ext cx="2971800" cy="458788"/>
+            <a:ext cx="2971800" cy="611188"/>
           </a:xfrm>
           <a:prstGeom prst="rect">
             <a:avLst/>
@@ -196,9 +209,8 @@
             </a:lvl1pPr>
           </a:lstStyle>
           <a:p>
-            <a:fld id="{5282F153-3F37-0F45-9E97-73ACFA13230C}" type="datetimeFigureOut">
-              <a:rPr lang="en-US"/>
-              <a:t>7/23/19</a:t>
+            <a:fld id="{F494899D-13ED-44EE-BEA1-83667A4BA683}" type="datetimeFigureOut">
+              <a:t>8/2/2026</a:t>
             </a:fld>
             <a:endParaRPr lang="en-US"/>
           </a:p>
@@ -216,8 +228,8 @@
         </p:nvSpPr>
         <p:spPr>
           <a:xfrm>
-            <a:off x="685800" y="1143000"/>
-            <a:ext cx="5486400" cy="3086100"/>
+            <a:off x="-228600" y="1524000"/>
+            <a:ext cx="7315200" cy="4114800"/>
           </a:xfrm>
           <a:prstGeom prst="rect">
             <a:avLst/>
@@ -249,8 +261,8 @@
         </p:nvSpPr>
         <p:spPr>
           <a:xfrm>
-            <a:off x="685800" y="4400550"/>
-            <a:ext cx="5486400" cy="3600450"/>
+            <a:off x="685800" y="5867400"/>
+            <a:ext cx="5486400" cy="4800600"/>
           </a:xfrm>
           <a:prstGeom prst="rect">
             <a:avLst/>
@@ -308,8 +320,8 @@
         </p:nvSpPr>
         <p:spPr>
           <a:xfrm>
-            <a:off x="0" y="8685213"/>
-            <a:ext cx="2971800" cy="458787"/>
+            <a:off x="0" y="11580813"/>
+            <a:ext cx="2971800" cy="611187"/>
           </a:xfrm>
           <a:prstGeom prst="rect">
             <a:avLst/>
@@ -339,8 +351,8 @@
         </p:nvSpPr>
         <p:spPr>
           <a:xfrm>
-            <a:off x="3884613" y="8685213"/>
-            <a:ext cx="2971800" cy="458787"/>
+            <a:off x="3884613" y="11580813"/>
+            <a:ext cx="2971800" cy="611187"/>
           </a:xfrm>
           <a:prstGeom prst="rect">
             <a:avLst/>
@@ -354,8 +366,7 @@
             </a:lvl1pPr>
           </a:lstStyle>
           <a:p>
-            <a:fld id="{CE5E9CC1-C706-0F49-92D6-E571CC5EEA8F}" type="slidenum">
-              <a:rPr lang="en-US"/>
+            <a:fld id="{AF9996A9-E3A3-428E-85CF-0D9C517D5743}" type="slidenum">
               <a:t>‹#›</a:t>
             </a:fld>
             <a:endParaRPr lang="en-US"/>
@@ -365,7 +376,7 @@
     </p:spTree>
     <p:extLst>
       <p:ext uri="{BB962C8B-B14F-4D97-AF65-F5344CB8AC3E}">
-        <p14:creationId xmlns:p14="http://schemas.microsoft.com/office/powerpoint/2010/main" val="1024086991"/>
+        <p14:creationId xmlns:p14="http://schemas.microsoft.com/office/powerpoint/2010/main" val="1709978221"/>
       </p:ext>
     </p:extLst>
   </p:cSld>
@@ -513,7 +524,6 @@
               <a:rPr lang="en-US" dirty="0"/>
               <a:t>Hi, I'm Murali Balarama Chakaravarthy, and this is NeuroAgent, my high-risk project for AI in Healthcare. In the next few minutes I'll walk through the problem I set out to solve, how I built the system, what I found when I tested it, and where I'd take it next.</a:t>
             </a:r>
-            <a:endParaRPr lang="en-US" dirty="0"/>
           </a:p>
         </p:txBody>
       </p:sp>
@@ -601,7 +611,6 @@
               <a:rPr lang="en-US" dirty="0"/>
               <a:t>To wrap up: NeuroAgent shows that a small team of AI specialists can surface real, explainable disagreement when reviewing EEG data, instead of hiding uncertainty behind one confident answer. And the case study I showed you, where an AI agent and a simple classical model shared the same blind spot, points to a real gap in the underlying data, not just random noise. This is a research prototype for a course project, not a medical device, and it's not a replacement for a real doctor. Thank you for watching — the notebook is included with this submission.</a:t>
             </a:r>
-            <a:endParaRPr lang="en-US" dirty="0"/>
           </a:p>
         </p:txBody>
       </p:sp>
@@ -689,7 +698,6 @@
               <a:rPr lang="en-US" dirty="0"/>
               <a:t>Epilepsy affects more than 50 million people worldwide. The type of seizure someone has really matters, because different types respond to different treatments. But reading an EEG to work out the type is genuinely hard, even for trained specialists. Two experienced doctors can look at the same recording and reach different conclusions. In real hospitals, doctors sometimes handle that uncertainty by asking a colleague to review a hard case with them. That's the idea I wanted to test with AI.</a:t>
             </a:r>
-            <a:endParaRPr lang="en-US" dirty="0"/>
           </a:p>
         </p:txBody>
       </p:sp>
@@ -777,7 +785,6 @@
               <a:rPr lang="en-US" dirty="0"/>
               <a:t>The core idea is simple: instead of one AI model giving one confident answer, ask three AI models, each playing a different clinical role, to review the same EEG data independently. One acts like a general neurologist, one like an epileptologist who specializes in hard cases, and one like a neurophysiologist focused purely on the signal itself. A fourth agent, the moderator, then compares all three opinions and explains where they agree or disagree, instead of just picking one winning answer.</a:t>
             </a:r>
-            <a:endParaRPr lang="en-US" dirty="0"/>
           </a:p>
         </p:txBody>
       </p:sp>
@@ -865,7 +872,6 @@
               <a:rPr lang="en-US" dirty="0"/>
               <a:t>For data, I used the CHB-MIT Scalp EEG Database, a public dataset of pediatric epilepsy EEG recordings hosted on PhysioNet. I worked with two patient cases and four EEG files, which gave me eight 20-second windows to test with — four during a labeled seizure, and four during normal activity for contrast.</a:t>
             </a:r>
-            <a:endParaRPr lang="en-US" dirty="0"/>
           </a:p>
         </p:txBody>
       </p:sp>
@@ -953,7 +959,6 @@
               <a:rPr lang="en-US" dirty="0"/>
               <a:t>Here's the full pipeline. Raw EEG data is first turned into a short, plain-text description of its frequency patterns — because language models read text, not raw signal. That description is matched against a small reference library of what different EEG patterns typically look like. Then the three specialist agents each independently review it, and the moderator summarizes their discussion.</a:t>
             </a:r>
-            <a:endParaRPr lang="en-US" dirty="0"/>
           </a:p>
         </p:txBody>
       </p:sp>
@@ -1041,7 +1046,6 @@
               <a:rPr lang="en-US" dirty="0"/>
               <a:t>Before trusting a complex system, it's worth asking how far a much simpler method gets with the same inputs. I trained a basic logistic regression model on the same five frequency-band numbers the AI agents see, using leave-one-out cross-validation since I only had 8 windows. It got 6 out of 8 correct, 75 percent. With this few samples, that's a rough signal, not a precise number — but it gives me something real to compare the AI board against.</a:t>
             </a:r>
-            <a:endParaRPr lang="en-US" dirty="0"/>
           </a:p>
         </p:txBody>
       </p:sp>
@@ -1129,7 +1133,6 @@
               <a:rPr lang="en-US" dirty="0"/>
               <a:t>Here's the most interesting result. Look at one specific EEG window, one that's labeled non-seizure in the dataset. The baseline classifier got it wrong, predicting seizure. And completely independently, the epileptologist agent also leaned toward possible seizure activity at medium confidence, while the neurologist agent correctly leaned away from it. That's not a coincidence. Two very different methods, a simple statistical model and a language model reasoning in plain text, were fooled by the same thing: this window likely reflects natural sleep activity, which looks a lot like seizure activity if you only look at average frequency power. That's a real, specific finding about where the input features fall short, not just random noise.</a:t>
             </a:r>
-            <a:endParaRPr lang="en-US" dirty="0"/>
           </a:p>
         </p:txBody>
       </p:sp>
@@ -1217,7 +1220,6 @@
               <a:rPr lang="en-US" dirty="0"/>
               <a:t>Across all eight windows, the three specialists didn't always agree, and the moderator was able to consistently point to a specific reason: whether strong slow-wave activity should be read as sleep or as seizure activity. That's the core behavior I set out to test — surfacing real uncertainty instead of a single falsely confident answer. I want to be upfront about the limitations too: all three agents currently use models from the same company, so their independence is limited; I only have detection labels, not seizure-type labels yet; the sample size is very small; and no real clinician has reviewed any of this. [DEMO CUE: switch screen to the Colab notebook here. Fast-forward through the run, then land on the results table and the chb05_06.edf output for a few seconds before cutting back to slides.]</a:t>
             </a:r>
-            <a:endParaRPr lang="en-US" dirty="0"/>
           </a:p>
         </p:txBody>
       </p:sp>
@@ -1305,7 +1307,6 @@
               <a:rPr lang="en-US" dirty="0"/>
               <a:t>If I kept going with this, here's where I'd take it. First, use a dataset with real seizure-type labels, like Siena or TUSZ, so the system can actually tell types apart, not just detect seizures. Second, add genuine model diversity by mixing in models from more than one company. Third, add a fourth agent focused on medication choice once a type is known, grounded in real treatment guidelines. And finally, I'd rebuild the multi-agent coordination using AutoGen, a framework built specifically for this, instead of the hand-written code I used here.</a:t>
             </a:r>
-            <a:endParaRPr lang="en-US" dirty="0"/>
           </a:p>
         </p:txBody>
       </p:sp>
@@ -1378,6 +1379,11 @@
 <file path=ppt/slideMasters/slideMaster1.xml><?xml version="1.0" encoding="utf-8"?>
 <p:sldMaster xmlns:a="http://schemas.openxmlformats.org/drawingml/2006/main" xmlns:r="http://schemas.openxmlformats.org/officeDocument/2006/relationships" xmlns:p="http://schemas.openxmlformats.org/presentationml/2006/main">
   <p:cSld>
+    <p:bg>
+      <p:bgRef idx="1001">
+        <a:schemeClr val="bg1"/>
+      </p:bgRef>
+    </p:bg>
     <p:spTree>
       <p:nvGrpSpPr>
         <p:cNvPr id="1" name=""/>
@@ -1660,6 +1666,7 @@
         <a:solidFill>
           <a:srgbClr val="21295C"/>
         </a:solidFill>
+        <a:effectLst/>
       </p:bgPr>
     </p:bg>
     <p:spTree>
@@ -1697,7 +1704,7 @@
           <a:bodyPr wrap="square" lIns="0" tIns="0" rIns="0" bIns="0" rtlCol="0" anchor="ctr"/>
           <a:lstStyle/>
           <a:p>
-            <a:pPr algn="ctr" indent="0" marL="0">
+            <a:pPr marL="0" indent="0" algn="ctr">
               <a:buNone/>
             </a:pPr>
             <a:r>
@@ -1736,7 +1743,7 @@
           <a:bodyPr wrap="square" lIns="0" tIns="0" rIns="0" bIns="0" rtlCol="0" anchor="ctr"/>
           <a:lstStyle/>
           <a:p>
-            <a:pPr algn="ctr" indent="0" marL="0">
+            <a:pPr marL="0" indent="0" algn="ctr">
               <a:buNone/>
             </a:pPr>
             <a:r>
@@ -1775,7 +1782,7 @@
           <a:bodyPr wrap="square" lIns="0" tIns="0" rIns="0" bIns="0" rtlCol="0" anchor="ctr"/>
           <a:lstStyle/>
           <a:p>
-            <a:pPr algn="ctr" indent="0" marL="0">
+            <a:pPr marL="0" indent="0" algn="ctr">
               <a:buNone/>
             </a:pPr>
             <a:r>
@@ -1814,7 +1821,7 @@
           <a:bodyPr wrap="square" lIns="0" tIns="0" rIns="0" bIns="0" rtlCol="0" anchor="ctr"/>
           <a:lstStyle/>
           <a:p>
-            <a:pPr algn="ctr" indent="0" marL="0">
+            <a:pPr marL="0" indent="0" algn="ctr">
               <a:buNone/>
             </a:pPr>
             <a:r>
@@ -1848,6 +1855,7 @@
         <a:solidFill>
           <a:srgbClr val="21295C"/>
         </a:solidFill>
+        <a:effectLst/>
       </p:bgPr>
     </p:bg>
     <p:spTree>
@@ -1885,7 +1893,7 @@
           <a:bodyPr wrap="square" lIns="0" tIns="0" rIns="0" bIns="0" rtlCol="0" anchor="ctr"/>
           <a:lstStyle/>
           <a:p>
-            <a:pPr algn="ctr" indent="0" marL="0">
+            <a:pPr marL="0" indent="0" algn="ctr">
               <a:buNone/>
             </a:pPr>
             <a:r>
@@ -1924,96 +1932,133 @@
           <a:bodyPr wrap="square" lIns="0" tIns="0" rIns="0" bIns="0" rtlCol="0" anchor="t"/>
           <a:lstStyle/>
           <a:p>
-            <a:pPr algn="ctr" indent="0" marL="0">
-              <a:buNone/>
-            </a:pPr>
+            <a:pPr algn="ctr"/>
+            <a:r>
+              <a:rPr lang="en-US" sz="1900" err="1">
+                <a:solidFill>
+                  <a:srgbClr val="CADCFC"/>
+                </a:solidFill>
+                <a:latin typeface="Calibri"/>
+                <a:ea typeface="Calibri"/>
+                <a:cs typeface="Calibri"/>
+              </a:rPr>
+              <a:t>NeuroAgent</a:t>
+            </a:r>
             <a:r>
               <a:rPr lang="en-US" sz="1900" dirty="0">
                 <a:solidFill>
                   <a:srgbClr val="CADCFC"/>
+                </a:solidFill>
+                <a:latin typeface="Calibri"/>
+                <a:ea typeface="Calibri"/>
+                <a:cs typeface="Calibri"/>
+              </a:rPr>
+              <a:t> shows that a small team of AI specialists can surface genuine, explainable </a:t>
+            </a:r>
+            <a:r>
+              <a:rPr lang="en-US" sz="1900">
+                <a:solidFill>
+                  <a:srgbClr val="CADCFC"/>
+                </a:solidFill>
+                <a:latin typeface="Calibri"/>
+                <a:ea typeface="Calibri"/>
+                <a:cs typeface="Calibri"/>
+              </a:rPr>
+              <a:t>disagreement in EEG review - and that a shared blind spot between an AI agent and a classical </a:t>
+            </a:r>
+            <a:r>
+              <a:rPr lang="en-US" sz="1900" dirty="0">
+                <a:solidFill>
+                  <a:srgbClr val="CADCFC"/>
+                </a:solidFill>
+                <a:latin typeface="Calibri"/>
+                <a:ea typeface="Calibri"/>
+                <a:cs typeface="Calibri"/>
+              </a:rPr>
+              <a:t>model can point to a real gap in the data, not just noise.</a:t>
+            </a:r>
+            <a:endParaRPr lang="en-US" sz="1900" dirty="0">
+              <a:latin typeface="Calibri"/>
+              <a:ea typeface="Calibri"/>
+              <a:cs typeface="Calibri"/>
+            </a:endParaRPr>
+          </a:p>
+        </p:txBody>
+      </p:sp>
+      <p:sp>
+        <p:nvSpPr>
+          <p:cNvPr id="4" name="Text 2"/>
+          <p:cNvSpPr/>
+          <p:nvPr/>
+        </p:nvSpPr>
+        <p:spPr>
+          <a:xfrm>
+            <a:off x="1371600" y="4023360"/>
+            <a:ext cx="9418320" cy="731520"/>
+          </a:xfrm>
+          <a:prstGeom prst="rect">
+            <a:avLst/>
+          </a:prstGeom>
+          <a:noFill/>
+          <a:ln/>
+        </p:spPr>
+        <p:txBody>
+          <a:bodyPr wrap="square" lIns="0" tIns="0" rIns="0" bIns="0" rtlCol="0" anchor="ctr"/>
+          <a:lstStyle/>
+          <a:p>
+            <a:pPr algn="ctr"/>
+            <a:r>
+              <a:rPr lang="en-US" sz="1500" i="1">
+                <a:solidFill>
+                  <a:srgbClr val="9FB3D9"/>
+                </a:solidFill>
+                <a:latin typeface="Calibri"/>
+                <a:ea typeface="Calibri"/>
+                <a:cs typeface="Calibri"/>
+              </a:rPr>
+              <a:t>It's a research prototype,  and not a replacement for a real doctor's judgment.</a:t>
+            </a:r>
+            <a:endParaRPr lang="en-US" sz="1500">
+              <a:latin typeface="Calibri"/>
+              <a:ea typeface="Calibri"/>
+              <a:cs typeface="Calibri"/>
+            </a:endParaRPr>
+          </a:p>
+        </p:txBody>
+      </p:sp>
+      <p:sp>
+        <p:nvSpPr>
+          <p:cNvPr id="5" name="Text 3"/>
+          <p:cNvSpPr/>
+          <p:nvPr/>
+        </p:nvSpPr>
+        <p:spPr>
+          <a:xfrm>
+            <a:off x="1371600" y="5303520"/>
+            <a:ext cx="9418320" cy="457200"/>
+          </a:xfrm>
+          <a:prstGeom prst="rect">
+            <a:avLst/>
+          </a:prstGeom>
+          <a:noFill/>
+          <a:ln/>
+        </p:spPr>
+        <p:txBody>
+          <a:bodyPr wrap="square" lIns="0" tIns="0" rIns="0" bIns="0" rtlCol="0" anchor="ctr"/>
+          <a:lstStyle/>
+          <a:p>
+            <a:pPr marL="0" indent="0" algn="ctr">
+              <a:buNone/>
+            </a:pPr>
+            <a:r>
+              <a:rPr lang="en-US" sz="1400" dirty="0">
+                <a:solidFill>
+                  <a:srgbClr val="9FB3D9"/>
                 </a:solidFill>
                 <a:latin typeface="Calibri" pitchFamily="34" charset="0"/>
                 <a:ea typeface="Calibri" pitchFamily="34" charset="-122"/>
                 <a:cs typeface="Calibri" pitchFamily="34" charset="-120"/>
               </a:rPr>
-              <a:t>NeuroAgent shows that a small team of AI specialists can surface genuine, explainable disagreement in EEG review — and that a shared blind spot between an AI agent and a classical model can point to a real gap in the data, not just noise.</a:t>
-            </a:r>
-            <a:endParaRPr lang="en-US" sz="1900" dirty="0"/>
-          </a:p>
-        </p:txBody>
-      </p:sp>
-      <p:sp>
-        <p:nvSpPr>
-          <p:cNvPr id="4" name="Text 2"/>
-          <p:cNvSpPr/>
-          <p:nvPr/>
-        </p:nvSpPr>
-        <p:spPr>
-          <a:xfrm>
-            <a:off x="1371600" y="4023360"/>
-            <a:ext cx="9418320" cy="731520"/>
-          </a:xfrm>
-          <a:prstGeom prst="rect">
-            <a:avLst/>
-          </a:prstGeom>
-          <a:noFill/>
-          <a:ln/>
-        </p:spPr>
-        <p:txBody>
-          <a:bodyPr wrap="square" lIns="0" tIns="0" rIns="0" bIns="0" rtlCol="0" anchor="ctr"/>
-          <a:lstStyle/>
-          <a:p>
-            <a:pPr algn="ctr" indent="0" marL="0">
-              <a:buNone/>
-            </a:pPr>
-            <a:r>
-              <a:rPr lang="en-US" sz="1500" i="1" dirty="0">
-                <a:solidFill>
-                  <a:srgbClr val="9FB3D9"/>
-                </a:solidFill>
-                <a:latin typeface="Calibri" pitchFamily="34" charset="0"/>
-                <a:ea typeface="Calibri" pitchFamily="34" charset="-122"/>
-                <a:cs typeface="Calibri" pitchFamily="34" charset="-120"/>
-              </a:rPr>
-              <a:t>It's a research prototype, not a medical device — and not a replacement for a real doctor's judgment.</a:t>
-            </a:r>
-            <a:endParaRPr lang="en-US" sz="1500" dirty="0"/>
-          </a:p>
-        </p:txBody>
-      </p:sp>
-      <p:sp>
-        <p:nvSpPr>
-          <p:cNvPr id="5" name="Text 3"/>
-          <p:cNvSpPr/>
-          <p:nvPr/>
-        </p:nvSpPr>
-        <p:spPr>
-          <a:xfrm>
-            <a:off x="1371600" y="5303520"/>
-            <a:ext cx="9418320" cy="457200"/>
-          </a:xfrm>
-          <a:prstGeom prst="rect">
-            <a:avLst/>
-          </a:prstGeom>
-          <a:noFill/>
-          <a:ln/>
-        </p:spPr>
-        <p:txBody>
-          <a:bodyPr wrap="square" lIns="0" tIns="0" rIns="0" bIns="0" rtlCol="0" anchor="ctr"/>
-          <a:lstStyle/>
-          <a:p>
-            <a:pPr algn="ctr" indent="0" marL="0">
-              <a:buNone/>
-            </a:pPr>
-            <a:r>
-              <a:rPr lang="en-US" sz="1400" dirty="0">
-                <a:solidFill>
-                  <a:srgbClr val="9FB3D9"/>
-                </a:solidFill>
-                <a:latin typeface="Calibri" pitchFamily="34" charset="0"/>
-                <a:ea typeface="Calibri" pitchFamily="34" charset="-122"/>
-                <a:cs typeface="Calibri" pitchFamily="34" charset="-120"/>
-              </a:rPr>
               <a:t>Code submitted as a Colab notebook alongside this presentation</a:t>
             </a:r>
             <a:endParaRPr lang="en-US" sz="1400" dirty="0"/>
@@ -2041,7 +2086,7 @@
           <a:bodyPr wrap="square" lIns="0" tIns="0" rIns="0" bIns="0" rtlCol="0" anchor="ctr"/>
           <a:lstStyle/>
           <a:p>
-            <a:pPr algn="ctr" indent="0" marL="0">
+            <a:pPr marL="0" indent="0" algn="ctr">
               <a:buNone/>
             </a:pPr>
             <a:r>
@@ -2075,6 +2120,7 @@
         <a:solidFill>
           <a:srgbClr val="FFFFFF"/>
         </a:solidFill>
+        <a:effectLst/>
       </p:bgPr>
     </p:bg>
     <p:spTree>
@@ -2112,7 +2158,7 @@
           <a:bodyPr wrap="square" lIns="0" tIns="0" rIns="0" bIns="0" rtlCol="0" anchor="ctr"/>
           <a:lstStyle/>
           <a:p>
-            <a:pPr algn="l" indent="0" marL="0">
+            <a:pPr marL="0" indent="0" algn="l">
               <a:buNone/>
             </a:pPr>
             <a:r>
@@ -2151,7 +2197,7 @@
           <a:bodyPr wrap="square" lIns="0" tIns="0" rIns="0" bIns="0" rtlCol="0" anchor="t"/>
           <a:lstStyle/>
           <a:p>
-            <a:pPr algn="l" indent="0" marL="0">
+            <a:pPr marL="0" indent="0" algn="l">
               <a:buNone/>
             </a:pPr>
             <a:r>
@@ -2190,7 +2236,7 @@
           <a:bodyPr wrap="square" lIns="0" tIns="0" rIns="0" bIns="0" rtlCol="0" anchor="t"/>
           <a:lstStyle/>
           <a:p>
-            <a:pPr algn="l" indent="0" marL="0">
+            <a:pPr marL="0" indent="0" algn="l">
               <a:buNone/>
             </a:pPr>
             <a:r>
@@ -2249,7 +2295,7 @@
           <a:bodyPr wrap="square" lIns="0" tIns="0" rIns="0" bIns="0" rtlCol="0" anchor="ctr"/>
           <a:lstStyle/>
           <a:p>
-            <a:pPr algn="ctr" indent="0" marL="0">
+            <a:pPr marL="0" indent="0" algn="ctr">
               <a:buNone/>
             </a:pPr>
             <a:r>
@@ -2288,7 +2334,7 @@
           <a:bodyPr wrap="square" lIns="0" tIns="0" rIns="0" bIns="0" rtlCol="0" anchor="t"/>
           <a:lstStyle/>
           <a:p>
-            <a:pPr algn="ctr" indent="0" marL="0">
+            <a:pPr marL="0" indent="0" algn="ctr">
               <a:buNone/>
             </a:pPr>
             <a:r>
@@ -2349,21 +2395,36 @@
           <a:bodyPr wrap="square" lIns="0" tIns="0" rIns="0" bIns="0" rtlCol="0" anchor="ctr"/>
           <a:lstStyle/>
           <a:p>
-            <a:pPr algn="l" indent="0" marL="0">
-              <a:buNone/>
-            </a:pPr>
+            <a:pPr marL="0" indent="0" algn="l">
+              <a:buNone/>
+            </a:pPr>
+            <a:r>
+              <a:rPr lang="en-US" sz="1600" i="1">
+                <a:solidFill>
+                  <a:srgbClr val="21295C"/>
+                </a:solidFill>
+                <a:latin typeface="Calibri"/>
+                <a:ea typeface="Calibri"/>
+                <a:cs typeface="Calibri"/>
+              </a:rPr>
+              <a:t>In hospitals, doctors sometimes handle uncertain cases by asking a colleague, or a full team, to review it together. This </a:t>
+            </a:r>
             <a:r>
               <a:rPr lang="en-US" sz="1600" i="1" dirty="0">
                 <a:solidFill>
                   <a:srgbClr val="21295C"/>
                 </a:solidFill>
-                <a:latin typeface="Calibri" pitchFamily="34" charset="0"/>
-                <a:ea typeface="Calibri" pitchFamily="34" charset="-122"/>
-                <a:cs typeface="Calibri" pitchFamily="34" charset="-120"/>
-              </a:rPr>
-              <a:t>In real hospitals, doctors sometimes handle uncertain cases by asking a colleague, or a full team, to review it together. This project asks: can a small team of AI models do something similar?</a:t>
-            </a:r>
-            <a:endParaRPr lang="en-US" sz="1600" dirty="0"/>
+                <a:latin typeface="Calibri"/>
+                <a:ea typeface="Calibri"/>
+                <a:cs typeface="Calibri"/>
+              </a:rPr>
+              <a:t>project asks: can a small team of AI models do something similar?</a:t>
+            </a:r>
+            <a:endParaRPr lang="en-US" sz="1600" dirty="0">
+              <a:latin typeface="Calibri"/>
+              <a:ea typeface="Calibri"/>
+              <a:cs typeface="Calibri"/>
+            </a:endParaRPr>
           </a:p>
         </p:txBody>
       </p:sp>
@@ -2388,7 +2449,7 @@
           <a:bodyPr wrap="square" lIns="0" tIns="0" rIns="0" bIns="0" rtlCol="0" anchor="ctr"/>
           <a:lstStyle/>
           <a:p>
-            <a:pPr algn="r" indent="0" marL="0">
+            <a:pPr marL="0" indent="0" algn="r">
               <a:buNone/>
             </a:pPr>
             <a:r>
@@ -2422,6 +2483,7 @@
         <a:solidFill>
           <a:srgbClr val="FFFFFF"/>
         </a:solidFill>
+        <a:effectLst/>
       </p:bgPr>
     </p:bg>
     <p:spTree>
@@ -2459,7 +2521,7 @@
           <a:bodyPr wrap="square" lIns="0" tIns="0" rIns="0" bIns="0" rtlCol="0" anchor="ctr"/>
           <a:lstStyle/>
           <a:p>
-            <a:pPr algn="l" indent="0" marL="0">
+            <a:pPr marL="0" indent="0" algn="l">
               <a:buNone/>
             </a:pPr>
             <a:r>
@@ -2498,7 +2560,7 @@
           <a:bodyPr wrap="square" lIns="0" tIns="0" rIns="0" bIns="0" rtlCol="0" anchor="t"/>
           <a:lstStyle/>
           <a:p>
-            <a:pPr indent="0" marL="0">
+            <a:pPr marL="0" indent="0">
               <a:buNone/>
             </a:pPr>
             <a:r>
@@ -2564,7 +2626,7 @@
           <a:bodyPr wrap="square" lIns="0" tIns="0" rIns="0" bIns="0" rtlCol="0" anchor="ctr"/>
           <a:lstStyle/>
           <a:p>
-            <a:pPr indent="0" marL="0">
+            <a:pPr marL="0" indent="0">
               <a:buNone/>
             </a:pPr>
             <a:r>
@@ -2603,7 +2665,7 @@
           <a:bodyPr wrap="square" lIns="0" tIns="0" rIns="0" bIns="0" rtlCol="0" anchor="t"/>
           <a:lstStyle/>
           <a:p>
-            <a:pPr indent="0" marL="0">
+            <a:pPr marL="0" indent="0">
               <a:buNone/>
             </a:pPr>
             <a:r>
@@ -2669,7 +2731,7 @@
           <a:bodyPr wrap="square" lIns="0" tIns="0" rIns="0" bIns="0" rtlCol="0" anchor="ctr"/>
           <a:lstStyle/>
           <a:p>
-            <a:pPr indent="0" marL="0">
+            <a:pPr marL="0" indent="0">
               <a:buNone/>
             </a:pPr>
             <a:r>
@@ -2708,7 +2770,7 @@
           <a:bodyPr wrap="square" lIns="0" tIns="0" rIns="0" bIns="0" rtlCol="0" anchor="t"/>
           <a:lstStyle/>
           <a:p>
-            <a:pPr indent="0" marL="0">
+            <a:pPr marL="0" indent="0">
               <a:buNone/>
             </a:pPr>
             <a:r>
@@ -2774,7 +2836,7 @@
           <a:bodyPr wrap="square" lIns="0" tIns="0" rIns="0" bIns="0" rtlCol="0" anchor="ctr"/>
           <a:lstStyle/>
           <a:p>
-            <a:pPr indent="0" marL="0">
+            <a:pPr marL="0" indent="0">
               <a:buNone/>
             </a:pPr>
             <a:r>
@@ -2813,7 +2875,7 @@
           <a:bodyPr wrap="square" lIns="0" tIns="0" rIns="0" bIns="0" rtlCol="0" anchor="t"/>
           <a:lstStyle/>
           <a:p>
-            <a:pPr indent="0" marL="0">
+            <a:pPr marL="0" indent="0">
               <a:buNone/>
             </a:pPr>
             <a:r>
@@ -2852,21 +2914,33 @@
           <a:bodyPr wrap="square" lIns="0" tIns="0" rIns="0" bIns="0" rtlCol="0" anchor="t"/>
           <a:lstStyle/>
           <a:p>
-            <a:pPr indent="0" marL="0">
-              <a:buNone/>
-            </a:pPr>
+            <a:r>
+              <a:rPr lang="en-US" sz="1600" i="1">
+                <a:solidFill>
+                  <a:srgbClr val="21295C"/>
+                </a:solidFill>
+                <a:latin typeface="Calibri"/>
+                <a:ea typeface="Calibri"/>
+                <a:cs typeface="Calibri"/>
+              </a:rPr>
+              <a:t>A fourth AI agent, the moderator, compares the three opinions and explains where they agree or disagree  - instead of just picking a </a:t>
+            </a:r>
             <a:r>
               <a:rPr lang="en-US" sz="1600" i="1" dirty="0">
                 <a:solidFill>
                   <a:srgbClr val="21295C"/>
                 </a:solidFill>
-                <a:latin typeface="Calibri" pitchFamily="34" charset="0"/>
-                <a:ea typeface="Calibri" pitchFamily="34" charset="-122"/>
-                <a:cs typeface="Calibri" pitchFamily="34" charset="-120"/>
-              </a:rPr>
-              <a:t>A fourth AI agent, the moderator, compares the three opinions and explains where they agree or disagree — instead of just picking a winner.</a:t>
-            </a:r>
-            <a:endParaRPr lang="en-US" sz="1600" dirty="0"/>
+                <a:latin typeface="Calibri"/>
+                <a:ea typeface="Calibri"/>
+                <a:cs typeface="Calibri"/>
+              </a:rPr>
+              <a:t>winner.</a:t>
+            </a:r>
+            <a:endParaRPr lang="en-US" sz="1600" dirty="0">
+              <a:latin typeface="Calibri"/>
+              <a:ea typeface="Calibri"/>
+              <a:cs typeface="Calibri"/>
+            </a:endParaRPr>
           </a:p>
         </p:txBody>
       </p:sp>
@@ -2891,7 +2965,7 @@
           <a:bodyPr wrap="square" lIns="0" tIns="0" rIns="0" bIns="0" rtlCol="0" anchor="ctr"/>
           <a:lstStyle/>
           <a:p>
-            <a:pPr algn="r" indent="0" marL="0">
+            <a:pPr marL="0" indent="0" algn="r">
               <a:buNone/>
             </a:pPr>
             <a:r>
@@ -2925,6 +2999,7 @@
         <a:solidFill>
           <a:srgbClr val="FFFFFF"/>
         </a:solidFill>
+        <a:effectLst/>
       </p:bgPr>
     </p:bg>
     <p:spTree>
@@ -2962,7 +3037,7 @@
           <a:bodyPr wrap="square" lIns="0" tIns="0" rIns="0" bIns="0" rtlCol="0" anchor="ctr"/>
           <a:lstStyle/>
           <a:p>
-            <a:pPr algn="l" indent="0" marL="0">
+            <a:pPr marL="0" indent="0" algn="l">
               <a:buNone/>
             </a:pPr>
             <a:r>
@@ -3001,7 +3076,7 @@
           <a:bodyPr wrap="square" lIns="0" tIns="0" rIns="0" bIns="0" rtlCol="0" anchor="t"/>
           <a:lstStyle/>
           <a:p>
-            <a:pPr indent="0" marL="0">
+            <a:pPr marL="0" indent="0">
               <a:buNone/>
             </a:pPr>
             <a:r>
@@ -3040,7 +3115,7 @@
           <a:bodyPr wrap="square" lIns="0" tIns="0" rIns="0" bIns="0" rtlCol="0" anchor="t"/>
           <a:lstStyle/>
           <a:p>
-            <a:pPr indent="0" marL="0">
+            <a:pPr marL="0" indent="0">
               <a:buNone/>
             </a:pPr>
             <a:r>
@@ -3099,7 +3174,7 @@
           <a:bodyPr wrap="square" lIns="0" tIns="0" rIns="0" bIns="0" rtlCol="0" anchor="ctr"/>
           <a:lstStyle/>
           <a:p>
-            <a:pPr algn="ctr" indent="0" marL="0">
+            <a:pPr marL="0" indent="0" algn="ctr">
               <a:buNone/>
             </a:pPr>
             <a:r>
@@ -3138,7 +3213,7 @@
           <a:bodyPr wrap="square" lIns="0" tIns="0" rIns="0" bIns="0" rtlCol="0" anchor="t"/>
           <a:lstStyle/>
           <a:p>
-            <a:pPr algn="ctr" indent="0" marL="0">
+            <a:pPr marL="0" indent="0" algn="ctr">
               <a:buNone/>
             </a:pPr>
             <a:r>
@@ -3197,7 +3272,7 @@
           <a:bodyPr wrap="square" lIns="0" tIns="0" rIns="0" bIns="0" rtlCol="0" anchor="ctr"/>
           <a:lstStyle/>
           <a:p>
-            <a:pPr algn="ctr" indent="0" marL="0">
+            <a:pPr marL="0" indent="0" algn="ctr">
               <a:buNone/>
             </a:pPr>
             <a:r>
@@ -3236,7 +3311,7 @@
           <a:bodyPr wrap="square" lIns="0" tIns="0" rIns="0" bIns="0" rtlCol="0" anchor="t"/>
           <a:lstStyle/>
           <a:p>
-            <a:pPr algn="ctr" indent="0" marL="0">
+            <a:pPr marL="0" indent="0" algn="ctr">
               <a:buNone/>
             </a:pPr>
             <a:r>
@@ -3295,7 +3370,7 @@
           <a:bodyPr wrap="square" lIns="0" tIns="0" rIns="0" bIns="0" rtlCol="0" anchor="ctr"/>
           <a:lstStyle/>
           <a:p>
-            <a:pPr algn="ctr" indent="0" marL="0">
+            <a:pPr marL="0" indent="0" algn="ctr">
               <a:buNone/>
             </a:pPr>
             <a:r>
@@ -3334,7 +3409,7 @@
           <a:bodyPr wrap="square" lIns="0" tIns="0" rIns="0" bIns="0" rtlCol="0" anchor="t"/>
           <a:lstStyle/>
           <a:p>
-            <a:pPr algn="ctr" indent="0" marL="0">
+            <a:pPr marL="0" indent="0" algn="ctr">
               <a:buNone/>
             </a:pPr>
             <a:r>
@@ -3393,7 +3468,7 @@
           <a:bodyPr wrap="square" lIns="0" tIns="0" rIns="0" bIns="0" rtlCol="0" anchor="ctr"/>
           <a:lstStyle/>
           <a:p>
-            <a:pPr algn="ctr" indent="0" marL="0">
+            <a:pPr marL="0" indent="0" algn="ctr">
               <a:buNone/>
             </a:pPr>
             <a:r>
@@ -3432,7 +3507,7 @@
           <a:bodyPr wrap="square" lIns="0" tIns="0" rIns="0" bIns="0" rtlCol="0" anchor="t"/>
           <a:lstStyle/>
           <a:p>
-            <a:pPr algn="ctr" indent="0" marL="0">
+            <a:pPr marL="0" indent="0" algn="ctr">
               <a:buNone/>
             </a:pPr>
             <a:r>
@@ -3471,7 +3546,7 @@
           <a:bodyPr wrap="square" lIns="0" tIns="0" rIns="0" bIns="0" rtlCol="0" anchor="ctr"/>
           <a:lstStyle/>
           <a:p>
-            <a:pPr algn="r" indent="0" marL="0">
+            <a:pPr marL="0" indent="0" algn="r">
               <a:buNone/>
             </a:pPr>
             <a:r>
@@ -3505,6 +3580,7 @@
         <a:solidFill>
           <a:srgbClr val="FFFFFF"/>
         </a:solidFill>
+        <a:effectLst/>
       </p:bgPr>
     </p:bg>
     <p:spTree>
@@ -3542,7 +3618,7 @@
           <a:bodyPr wrap="square" lIns="0" tIns="0" rIns="0" bIns="0" rtlCol="0" anchor="ctr"/>
           <a:lstStyle/>
           <a:p>
-            <a:pPr algn="l" indent="0" marL="0">
+            <a:pPr marL="0" indent="0" algn="l">
               <a:buNone/>
             </a:pPr>
             <a:r>
@@ -3562,22 +3638,22 @@
       </p:sp>
       <p:pic>
         <p:nvPicPr>
-          <p:cNvPr id="3" name="Image 0" descr="/home/claude/report_assets/figure1_workflow.png">    </p:cNvPr>
+          <p:cNvPr id="3" name="Image 0" descr="/home/claude/report_assets/figure1_workflow.png"/>
           <p:cNvPicPr>
             <a:picLocks noChangeAspect="1"/>
           </p:cNvPicPr>
           <p:nvPr/>
         </p:nvPicPr>
         <p:blipFill>
-          <a:blip r:embed="rId1"/>
+          <a:blip r:embed="rId3"/>
           <a:stretch>
             <a:fillRect/>
           </a:stretch>
         </p:blipFill>
         <p:spPr>
           <a:xfrm>
-            <a:off x="3703320" y="1417320"/>
-            <a:ext cx="4343400" cy="4892040"/>
+            <a:off x="3703320" y="809650"/>
+            <a:ext cx="6147121" cy="5499710"/>
           </a:xfrm>
           <a:prstGeom prst="rect">
             <a:avLst/>
@@ -3605,7 +3681,7 @@
           <a:bodyPr wrap="square" lIns="0" tIns="0" rIns="0" bIns="0" rtlCol="0" anchor="t"/>
           <a:lstStyle/>
           <a:p>
-            <a:pPr indent="0" marL="0">
+            <a:pPr marL="0" indent="0">
               <a:buNone/>
             </a:pPr>
             <a:r>
@@ -3644,7 +3720,7 @@
           <a:bodyPr wrap="square" lIns="0" tIns="0" rIns="0" bIns="0" rtlCol="0" anchor="ctr"/>
           <a:lstStyle/>
           <a:p>
-            <a:pPr algn="r" indent="0" marL="0">
+            <a:pPr marL="0" indent="0" algn="r">
               <a:buNone/>
             </a:pPr>
             <a:r>
@@ -3678,6 +3754,7 @@
         <a:solidFill>
           <a:srgbClr val="FFFFFF"/>
         </a:solidFill>
+        <a:effectLst/>
       </p:bgPr>
     </p:bg>
     <p:spTree>
@@ -3715,7 +3792,7 @@
           <a:bodyPr wrap="square" lIns="0" tIns="0" rIns="0" bIns="0" rtlCol="0" anchor="ctr"/>
           <a:lstStyle/>
           <a:p>
-            <a:pPr algn="l" indent="0" marL="0">
+            <a:pPr marL="0" indent="0" algn="l">
               <a:buNone/>
             </a:pPr>
             <a:r>
@@ -3754,7 +3831,7 @@
           <a:bodyPr wrap="square" lIns="0" tIns="0" rIns="0" bIns="0" rtlCol="0" anchor="t"/>
           <a:lstStyle/>
           <a:p>
-            <a:pPr indent="0" marL="0">
+            <a:pPr marL="0" indent="0">
               <a:buNone/>
             </a:pPr>
             <a:r>
@@ -3793,7 +3870,7 @@
           <a:bodyPr wrap="square" lIns="0" tIns="0" rIns="0" bIns="0" rtlCol="0" anchor="t"/>
           <a:lstStyle/>
           <a:p>
-            <a:pPr indent="0" marL="0">
+            <a:pPr marL="0" indent="0">
               <a:buNone/>
             </a:pPr>
             <a:r>
@@ -3801,13 +3878,28 @@
                 <a:solidFill>
                   <a:srgbClr val="1A1A1A"/>
                 </a:solidFill>
-                <a:latin typeface="Calibri" pitchFamily="34" charset="0"/>
-                <a:ea typeface="Calibri" pitchFamily="34" charset="-122"/>
-                <a:cs typeface="Calibri" pitchFamily="34" charset="-120"/>
-              </a:rPr>
-              <a:t>A logistic regression model was trained on the same five frequency-band numbers the AI agents see, and evaluated with leave-one-out cross-validation since only 8 windows were available.</a:t>
-            </a:r>
-            <a:endParaRPr lang="en-US" sz="1800" dirty="0"/>
+                <a:latin typeface="Calibri"/>
+                <a:ea typeface="Calibri"/>
+                <a:cs typeface="Calibri"/>
+              </a:rPr>
+              <a:t>A logistic regression model was trained on the same five frequency-band numbers the AI agents </a:t>
+            </a:r>
+            <a:r>
+              <a:rPr lang="en-US" sz="1800">
+                <a:solidFill>
+                  <a:srgbClr val="1A1A1A"/>
+                </a:solidFill>
+                <a:latin typeface="Calibri"/>
+                <a:ea typeface="Calibri"/>
+                <a:cs typeface="Calibri"/>
+              </a:rPr>
+              <a:t>see.</a:t>
+            </a:r>
+            <a:endParaRPr lang="en-US" sz="1800">
+              <a:latin typeface="Calibri"/>
+              <a:ea typeface="Calibri"/>
+              <a:cs typeface="Calibri"/>
+            </a:endParaRPr>
           </a:p>
         </p:txBody>
       </p:sp>
@@ -3852,7 +3944,7 @@
           <a:bodyPr wrap="square" lIns="0" tIns="0" rIns="0" bIns="0" rtlCol="0" anchor="ctr"/>
           <a:lstStyle/>
           <a:p>
-            <a:pPr algn="ctr" indent="0" marL="0">
+            <a:pPr marL="0" indent="0" algn="ctr">
               <a:buNone/>
             </a:pPr>
             <a:r>
@@ -3866,7 +3958,26 @@
               </a:rPr>
               <a:t>75%</a:t>
             </a:r>
-            <a:endParaRPr lang="en-US" sz="3000" dirty="0"/>
+          </a:p>
+          <a:p>
+            <a:pPr algn="ctr"/>
+            <a:r>
+              <a:rPr lang="en-US" sz="3000" b="1">
+                <a:solidFill>
+                  <a:srgbClr val="FFFFFF"/>
+                </a:solidFill>
+                <a:latin typeface="Cambria"/>
+                <a:ea typeface="Cambria"/>
+              </a:rPr>
+              <a:t>Accuracy</a:t>
+            </a:r>
+            <a:endParaRPr lang="en-US" sz="3000" b="1" dirty="0">
+              <a:solidFill>
+                <a:srgbClr val="FFFFFF"/>
+              </a:solidFill>
+              <a:latin typeface="Cambria"/>
+              <a:ea typeface="Cambria"/>
+            </a:endParaRPr>
           </a:p>
         </p:txBody>
       </p:sp>
@@ -3891,21 +4002,17 @@
           <a:bodyPr wrap="square" lIns="0" tIns="0" rIns="0" bIns="0" rtlCol="0" anchor="t"/>
           <a:lstStyle/>
           <a:p>
-            <a:pPr algn="ctr" indent="0" marL="0">
-              <a:buNone/>
-            </a:pPr>
-            <a:r>
-              <a:rPr lang="en-US" sz="1100" dirty="0">
-                <a:solidFill>
-                  <a:srgbClr val="1A1A1A"/>
-                </a:solidFill>
-                <a:latin typeface="Calibri" pitchFamily="34" charset="0"/>
-                <a:ea typeface="Calibri" pitchFamily="34" charset="-122"/>
-                <a:cs typeface="Calibri" pitchFamily="34" charset="-120"/>
-              </a:rPr>
-              <a:t>accuracy — 6 of 8 correct (leave-one-out)</a:t>
-            </a:r>
-            <a:endParaRPr lang="en-US" sz="1100" dirty="0"/>
+            <a:pPr marL="0" indent="0" algn="ctr">
+              <a:buNone/>
+            </a:pPr>
+            <a:endParaRPr lang="en-US" sz="1100" dirty="0">
+              <a:solidFill>
+                <a:srgbClr val="1A1A1A"/>
+              </a:solidFill>
+              <a:latin typeface="Calibri"/>
+              <a:ea typeface="Calibri"/>
+              <a:cs typeface="Calibri"/>
+            </a:endParaRPr>
           </a:p>
         </p:txBody>
       </p:sp>
@@ -3930,7 +4037,7 @@
           <a:bodyPr wrap="square" lIns="0" tIns="0" rIns="0" bIns="0" rtlCol="0" anchor="ctr"/>
           <a:lstStyle/>
           <a:p>
-            <a:pPr algn="r" indent="0" marL="0">
+            <a:pPr marL="0" indent="0" algn="r">
               <a:buNone/>
             </a:pPr>
             <a:r>
@@ -3964,6 +4071,7 @@
         <a:solidFill>
           <a:srgbClr val="FFFFFF"/>
         </a:solidFill>
+        <a:effectLst/>
       </p:bgPr>
     </p:bg>
     <p:spTree>
@@ -4021,7 +4129,7 @@
           <a:bodyPr wrap="square" lIns="0" tIns="0" rIns="0" bIns="0" rtlCol="0" anchor="ctr"/>
           <a:lstStyle/>
           <a:p>
-            <a:pPr algn="l" indent="0" marL="0">
+            <a:pPr marL="0" indent="0" algn="l">
               <a:buNone/>
             </a:pPr>
             <a:r>
@@ -4060,7 +4168,7 @@
           <a:bodyPr wrap="square" lIns="0" tIns="0" rIns="0" bIns="0" rtlCol="0" anchor="ctr"/>
           <a:lstStyle/>
           <a:p>
-            <a:pPr indent="0" marL="0">
+            <a:pPr marL="0" indent="0">
               <a:buNone/>
             </a:pPr>
             <a:r>
@@ -4121,7 +4229,7 @@
           <a:bodyPr wrap="square" lIns="0" tIns="0" rIns="0" bIns="0" rtlCol="0" anchor="ctr"/>
           <a:lstStyle/>
           <a:p>
-            <a:pPr indent="0" marL="0">
+            <a:pPr marL="0" indent="0">
               <a:buNone/>
             </a:pPr>
             <a:r>
@@ -4160,7 +4268,7 @@
           <a:bodyPr wrap="square" lIns="0" tIns="0" rIns="0" bIns="0" rtlCol="0" anchor="t"/>
           <a:lstStyle/>
           <a:p>
-            <a:pPr indent="0" marL="0">
+            <a:pPr marL="0" indent="0">
               <a:buNone/>
             </a:pPr>
             <a:r>
@@ -4221,7 +4329,7 @@
           <a:bodyPr wrap="square" lIns="0" tIns="0" rIns="0" bIns="0" rtlCol="0" anchor="ctr"/>
           <a:lstStyle/>
           <a:p>
-            <a:pPr indent="0" marL="0">
+            <a:pPr marL="0" indent="0">
               <a:buNone/>
             </a:pPr>
             <a:r>
@@ -4260,7 +4368,7 @@
           <a:bodyPr wrap="square" lIns="0" tIns="0" rIns="0" bIns="0" rtlCol="0" anchor="t"/>
           <a:lstStyle/>
           <a:p>
-            <a:pPr indent="0" marL="0">
+            <a:pPr marL="0" indent="0">
               <a:buNone/>
             </a:pPr>
             <a:r>
@@ -4299,7 +4407,7 @@
           <a:bodyPr wrap="square" lIns="0" tIns="0" rIns="0" bIns="0" rtlCol="0" anchor="t"/>
           <a:lstStyle/>
           <a:p>
-            <a:pPr indent="0" marL="0">
+            <a:pPr marL="0" indent="0">
               <a:buNone/>
             </a:pPr>
             <a:r>
@@ -4307,13 +4415,17 @@
                 <a:solidFill>
                   <a:srgbClr val="5A6B7A"/>
                 </a:solidFill>
-                <a:latin typeface="Calibri" pitchFamily="34" charset="0"/>
-                <a:ea typeface="Calibri" pitchFamily="34" charset="-122"/>
-                <a:cs typeface="Calibri" pitchFamily="34" charset="-120"/>
-              </a:rPr>
-              <a:t>This points to a real limitation in the input features, not a random error: the window likely reflects natural sleep activity, which looks similar to seizure activity when you only look at average frequency power.</a:t>
-            </a:r>
-            <a:endParaRPr lang="en-US" sz="1400" dirty="0"/>
+                <a:latin typeface="Calibri"/>
+                <a:ea typeface="Calibri"/>
+                <a:cs typeface="Calibri"/>
+              </a:rPr>
+              <a:t>This points to a real limitation in the input features, not a random error: the window likely reflects natural sleep activity, which looks similar to seizure activity.</a:t>
+            </a:r>
+            <a:endParaRPr lang="en-US" sz="1400" dirty="0">
+              <a:latin typeface="Calibri"/>
+              <a:ea typeface="Calibri"/>
+              <a:cs typeface="Calibri"/>
+            </a:endParaRPr>
           </a:p>
         </p:txBody>
       </p:sp>
@@ -4338,7 +4450,7 @@
           <a:bodyPr wrap="square" lIns="0" tIns="0" rIns="0" bIns="0" rtlCol="0" anchor="ctr"/>
           <a:lstStyle/>
           <a:p>
-            <a:pPr algn="r" indent="0" marL="0">
+            <a:pPr marL="0" indent="0" algn="r">
               <a:buNone/>
             </a:pPr>
             <a:r>
@@ -4372,6 +4484,7 @@
         <a:solidFill>
           <a:srgbClr val="FFFFFF"/>
         </a:solidFill>
+        <a:effectLst/>
       </p:bgPr>
     </p:bg>
     <p:spTree>
@@ -4409,7 +4522,7 @@
           <a:bodyPr wrap="square" lIns="0" tIns="0" rIns="0" bIns="0" rtlCol="0" anchor="ctr"/>
           <a:lstStyle/>
           <a:p>
-            <a:pPr algn="l" indent="0" marL="0">
+            <a:pPr marL="0" indent="0" algn="l">
               <a:buNone/>
             </a:pPr>
             <a:r>
@@ -4448,21 +4561,58 @@
           <a:bodyPr wrap="square" lIns="0" tIns="0" rIns="0" bIns="0" rtlCol="0" anchor="t"/>
           <a:lstStyle/>
           <a:p>
-            <a:pPr indent="0" marL="0">
-              <a:buNone/>
-            </a:pPr>
+            <a:pPr marL="0" indent="0">
+              <a:buNone/>
+            </a:pPr>
+            <a:r>
+              <a:rPr lang="en-US" sz="1800">
+                <a:solidFill>
+                  <a:srgbClr val="1A1A1A"/>
+                </a:solidFill>
+                <a:latin typeface="Calibri"/>
+                <a:ea typeface="Calibri"/>
+                <a:cs typeface="Calibri"/>
+              </a:rPr>
+              <a:t>Across all eight windows, the three AI specialists didn't always agree </a:t>
+            </a:r>
+            <a:r>
+              <a:rPr lang="en-US">
+                <a:solidFill>
+                  <a:srgbClr val="1A1A1A"/>
+                </a:solidFill>
+                <a:latin typeface="Calibri"/>
+                <a:ea typeface="Calibri"/>
+                <a:cs typeface="Calibri"/>
+              </a:rPr>
+              <a:t>-</a:t>
+            </a:r>
+            <a:r>
+              <a:rPr lang="en-US" sz="1800">
+                <a:solidFill>
+                  <a:srgbClr val="1A1A1A"/>
+                </a:solidFill>
+                <a:latin typeface="Calibri"/>
+                <a:ea typeface="Calibri"/>
+                <a:cs typeface="Calibri"/>
+              </a:rPr>
+              <a:t> and the moderator consistently pointed to a </a:t>
+            </a:r>
             <a:r>
               <a:rPr lang="en-US" sz="1800" dirty="0">
                 <a:solidFill>
                   <a:srgbClr val="1A1A1A"/>
                 </a:solidFill>
-                <a:latin typeface="Calibri" pitchFamily="34" charset="0"/>
-                <a:ea typeface="Calibri" pitchFamily="34" charset="-122"/>
-                <a:cs typeface="Calibri" pitchFamily="34" charset="-120"/>
-              </a:rPr>
-              <a:t>Across all eight windows, the three AI specialists didn't always agree — and the moderator consistently pointed to a specific, identifiable reason: whether strong slow-wave activity should be read as sleep or as seizure.</a:t>
-            </a:r>
-            <a:endParaRPr lang="en-US" sz="1800" dirty="0"/>
+                <a:latin typeface="Calibri"/>
+                <a:ea typeface="Calibri"/>
+                <a:cs typeface="Calibri"/>
+              </a:rPr>
+              <a:t>specific, identifiable reason: whether strong slow-wave activity should be read as sleep or as seizure.</a:t>
+            </a:r>
+            <a:endParaRPr lang="en-US" sz="1800" dirty="0">
+              <a:latin typeface="Calibri"/>
+              <a:ea typeface="Calibri"/>
+              <a:cs typeface="Calibri"/>
+            </a:endParaRPr>
           </a:p>
         </p:txBody>
       </p:sp>
@@ -4510,21 +4660,25 @@
           <a:bodyPr wrap="square" lIns="0" tIns="0" rIns="0" bIns="0" rtlCol="0" anchor="ctr"/>
           <a:lstStyle/>
           <a:p>
-            <a:pPr indent="0" marL="0">
-              <a:buNone/>
-            </a:pPr>
-            <a:r>
-              <a:rPr lang="en-US" sz="1800" b="1" dirty="0">
+            <a:pPr marL="0" indent="0">
+              <a:buNone/>
+            </a:pPr>
+            <a:r>
+              <a:rPr lang="en-US" sz="1800" b="1">
                 <a:solidFill>
                   <a:srgbClr val="21295C"/>
                 </a:solidFill>
-                <a:latin typeface="Cambria" pitchFamily="34" charset="0"/>
-                <a:ea typeface="Cambria" pitchFamily="34" charset="-122"/>
+                <a:latin typeface="Cambria"/>
+                <a:ea typeface="Cambria"/>
                 <a:cs typeface="Cambria" pitchFamily="34" charset="-120"/>
               </a:rPr>
-              <a:t>Limitations, honestly</a:t>
-            </a:r>
-            <a:endParaRPr lang="en-US" sz="1800" dirty="0"/>
+              <a:t>Limitations</a:t>
+            </a:r>
+            <a:endParaRPr lang="en-US" sz="1800" dirty="0">
+              <a:latin typeface="Calibri" panose="020F0502020204030204"/>
+              <a:ea typeface="Calibri" panose="020F0502020204030204"/>
+              <a:cs typeface="Calibri" panose="020F0502020204030204"/>
+            </a:endParaRPr>
           </a:p>
         </p:txBody>
       </p:sp>
@@ -4594,6 +4748,94 @@
               <a:buChar char="•"/>
             </a:pPr>
             <a:r>
+              <a:rPr lang="en-US" sz="1500">
+                <a:solidFill>
+                  <a:srgbClr val="1A1A1A"/>
+                </a:solidFill>
+                <a:latin typeface="Calibri"/>
+                <a:ea typeface="Calibri"/>
+                <a:cs typeface="Calibri"/>
+              </a:rPr>
+              <a:t>No seizure-type labels yet - detection only</a:t>
+            </a:r>
+            <a:endParaRPr lang="en-US" sz="1500">
+              <a:latin typeface="Calibri"/>
+              <a:ea typeface="Calibri"/>
+              <a:cs typeface="Calibri"/>
+            </a:endParaRPr>
+          </a:p>
+        </p:txBody>
+      </p:sp>
+      <p:sp>
+        <p:nvSpPr>
+          <p:cNvPr id="8" name="Text 6"/>
+          <p:cNvSpPr/>
+          <p:nvPr/>
+        </p:nvSpPr>
+        <p:spPr>
+          <a:xfrm>
+            <a:off x="548640" y="4745736"/>
+            <a:ext cx="10972800" cy="502920"/>
+          </a:xfrm>
+          <a:prstGeom prst="rect">
+            <a:avLst/>
+          </a:prstGeom>
+          <a:noFill/>
+          <a:ln/>
+        </p:spPr>
+        <p:txBody>
+          <a:bodyPr wrap="square" lIns="0" tIns="0" rIns="0" bIns="0" rtlCol="0" anchor="ctr"/>
+          <a:lstStyle/>
+          <a:p>
+            <a:pPr marL="342900" indent="-342900">
+              <a:buSzPct val="100000"/>
+              <a:buChar char="•"/>
+            </a:pPr>
+            <a:r>
+              <a:rPr lang="en-US" sz="1500">
+                <a:solidFill>
+                  <a:srgbClr val="1A1A1A"/>
+                </a:solidFill>
+                <a:latin typeface="Calibri"/>
+                <a:ea typeface="Calibri"/>
+                <a:cs typeface="Calibri"/>
+              </a:rPr>
+              <a:t>Only 2 patients, 8 windows - illustrative, not validated</a:t>
+            </a:r>
+            <a:endParaRPr lang="en-US" sz="1500">
+              <a:latin typeface="Calibri"/>
+              <a:ea typeface="Calibri"/>
+              <a:cs typeface="Calibri"/>
+            </a:endParaRPr>
+          </a:p>
+        </p:txBody>
+      </p:sp>
+      <p:sp>
+        <p:nvSpPr>
+          <p:cNvPr id="9" name="Text 7"/>
+          <p:cNvSpPr/>
+          <p:nvPr/>
+        </p:nvSpPr>
+        <p:spPr>
+          <a:xfrm>
+            <a:off x="548640" y="5312664"/>
+            <a:ext cx="10972800" cy="502920"/>
+          </a:xfrm>
+          <a:prstGeom prst="rect">
+            <a:avLst/>
+          </a:prstGeom>
+          <a:noFill/>
+          <a:ln/>
+        </p:spPr>
+        <p:txBody>
+          <a:bodyPr wrap="square" lIns="0" tIns="0" rIns="0" bIns="0" rtlCol="0" anchor="ctr"/>
+          <a:lstStyle/>
+          <a:p>
+            <a:pPr marL="342900" indent="-342900">
+              <a:buSzPct val="100000"/>
+              <a:buChar char="•"/>
+            </a:pPr>
+            <a:r>
               <a:rPr lang="en-US" sz="1500" dirty="0">
                 <a:solidFill>
                   <a:srgbClr val="1A1A1A"/>
@@ -4602,86 +4844,6 @@
                 <a:ea typeface="Calibri" pitchFamily="34" charset="-122"/>
                 <a:cs typeface="Calibri" pitchFamily="34" charset="-120"/>
               </a:rPr>
-              <a:t>No seizure-type labels yet — detection only</a:t>
-            </a:r>
-            <a:endParaRPr lang="en-US" sz="1500" dirty="0"/>
-          </a:p>
-        </p:txBody>
-      </p:sp>
-      <p:sp>
-        <p:nvSpPr>
-          <p:cNvPr id="8" name="Text 6"/>
-          <p:cNvSpPr/>
-          <p:nvPr/>
-        </p:nvSpPr>
-        <p:spPr>
-          <a:xfrm>
-            <a:off x="548640" y="4745736"/>
-            <a:ext cx="10972800" cy="502920"/>
-          </a:xfrm>
-          <a:prstGeom prst="rect">
-            <a:avLst/>
-          </a:prstGeom>
-          <a:noFill/>
-          <a:ln/>
-        </p:spPr>
-        <p:txBody>
-          <a:bodyPr wrap="square" lIns="0" tIns="0" rIns="0" bIns="0" rtlCol="0" anchor="ctr"/>
-          <a:lstStyle/>
-          <a:p>
-            <a:pPr marL="342900" indent="-342900">
-              <a:buSzPct val="100000"/>
-              <a:buChar char="•"/>
-            </a:pPr>
-            <a:r>
-              <a:rPr lang="en-US" sz="1500" dirty="0">
-                <a:solidFill>
-                  <a:srgbClr val="1A1A1A"/>
-                </a:solidFill>
-                <a:latin typeface="Calibri" pitchFamily="34" charset="0"/>
-                <a:ea typeface="Calibri" pitchFamily="34" charset="-122"/>
-                <a:cs typeface="Calibri" pitchFamily="34" charset="-120"/>
-              </a:rPr>
-              <a:t>Only 2 patients, 8 windows — illustrative, not validated</a:t>
-            </a:r>
-            <a:endParaRPr lang="en-US" sz="1500" dirty="0"/>
-          </a:p>
-        </p:txBody>
-      </p:sp>
-      <p:sp>
-        <p:nvSpPr>
-          <p:cNvPr id="9" name="Text 7"/>
-          <p:cNvSpPr/>
-          <p:nvPr/>
-        </p:nvSpPr>
-        <p:spPr>
-          <a:xfrm>
-            <a:off x="548640" y="5312664"/>
-            <a:ext cx="10972800" cy="502920"/>
-          </a:xfrm>
-          <a:prstGeom prst="rect">
-            <a:avLst/>
-          </a:prstGeom>
-          <a:noFill/>
-          <a:ln/>
-        </p:spPr>
-        <p:txBody>
-          <a:bodyPr wrap="square" lIns="0" tIns="0" rIns="0" bIns="0" rtlCol="0" anchor="ctr"/>
-          <a:lstStyle/>
-          <a:p>
-            <a:pPr marL="342900" indent="-342900">
-              <a:buSzPct val="100000"/>
-              <a:buChar char="•"/>
-            </a:pPr>
-            <a:r>
-              <a:rPr lang="en-US" sz="1500" dirty="0">
-                <a:solidFill>
-                  <a:srgbClr val="1A1A1A"/>
-                </a:solidFill>
-                <a:latin typeface="Calibri" pitchFamily="34" charset="0"/>
-                <a:ea typeface="Calibri" pitchFamily="34" charset="-122"/>
-                <a:cs typeface="Calibri" pitchFamily="34" charset="-120"/>
-              </a:rPr>
               <a:t>No clinician has reviewed the outputs</a:t>
             </a:r>
             <a:endParaRPr lang="en-US" sz="1500" dirty="0"/>
@@ -4709,7 +4871,7 @@
           <a:bodyPr wrap="square" lIns="0" tIns="0" rIns="0" bIns="0" rtlCol="0" anchor="ctr"/>
           <a:lstStyle/>
           <a:p>
-            <a:pPr algn="r" indent="0" marL="0">
+            <a:pPr marL="0" indent="0" algn="r">
               <a:buNone/>
             </a:pPr>
             <a:r>
@@ -4743,6 +4905,7 @@
         <a:solidFill>
           <a:srgbClr val="FFFFFF"/>
         </a:solidFill>
+        <a:effectLst/>
       </p:bgPr>
     </p:bg>
     <p:spTree>
@@ -4780,7 +4943,7 @@
           <a:bodyPr wrap="square" lIns="0" tIns="0" rIns="0" bIns="0" rtlCol="0" anchor="ctr"/>
           <a:lstStyle/>
           <a:p>
-            <a:pPr algn="l" indent="0" marL="0">
+            <a:pPr marL="0" indent="0" algn="l">
               <a:buNone/>
             </a:pPr>
             <a:r>
@@ -4841,7 +5004,7 @@
           <a:bodyPr wrap="square" lIns="0" tIns="0" rIns="0" bIns="0" rtlCol="0" anchor="ctr"/>
           <a:lstStyle/>
           <a:p>
-            <a:pPr indent="0" marL="0">
+            <a:pPr marL="0" indent="0">
               <a:buNone/>
             </a:pPr>
             <a:r>
@@ -4880,7 +5043,7 @@
           <a:bodyPr wrap="square" lIns="0" tIns="0" rIns="0" bIns="0" rtlCol="0" anchor="t"/>
           <a:lstStyle/>
           <a:p>
-            <a:pPr indent="0" marL="0">
+            <a:pPr marL="0" indent="0">
               <a:buNone/>
             </a:pPr>
             <a:r>
@@ -4941,7 +5104,7 @@
           <a:bodyPr wrap="square" lIns="0" tIns="0" rIns="0" bIns="0" rtlCol="0" anchor="ctr"/>
           <a:lstStyle/>
           <a:p>
-            <a:pPr indent="0" marL="0">
+            <a:pPr marL="0" indent="0">
               <a:buNone/>
             </a:pPr>
             <a:r>
@@ -4980,7 +5143,7 @@
           <a:bodyPr wrap="square" lIns="0" tIns="0" rIns="0" bIns="0" rtlCol="0" anchor="t"/>
           <a:lstStyle/>
           <a:p>
-            <a:pPr indent="0" marL="0">
+            <a:pPr marL="0" indent="0">
               <a:buNone/>
             </a:pPr>
             <a:r>
@@ -5041,7 +5204,7 @@
           <a:bodyPr wrap="square" lIns="0" tIns="0" rIns="0" bIns="0" rtlCol="0" anchor="ctr"/>
           <a:lstStyle/>
           <a:p>
-            <a:pPr indent="0" marL="0">
+            <a:pPr marL="0" indent="0">
               <a:buNone/>
             </a:pPr>
             <a:r>
@@ -5080,7 +5243,7 @@
           <a:bodyPr wrap="square" lIns="0" tIns="0" rIns="0" bIns="0" rtlCol="0" anchor="t"/>
           <a:lstStyle/>
           <a:p>
-            <a:pPr indent="0" marL="0">
+            <a:pPr marL="0" indent="0">
               <a:buNone/>
             </a:pPr>
             <a:r>
@@ -5141,19 +5304,38 @@
           <a:bodyPr wrap="square" lIns="0" tIns="0" rIns="0" bIns="0" rtlCol="0" anchor="ctr"/>
           <a:lstStyle/>
           <a:p>
-            <a:pPr indent="0" marL="0">
-              <a:buNone/>
-            </a:pPr>
             <a:r>
               <a:rPr lang="en-US" sz="1700" b="1" dirty="0">
                 <a:solidFill>
                   <a:srgbClr val="065A82"/>
                 </a:solidFill>
-                <a:latin typeface="Cambria" pitchFamily="34" charset="0"/>
-                <a:ea typeface="Cambria" pitchFamily="34" charset="-122"/>
+                <a:latin typeface="Cambria"/>
+                <a:ea typeface="Cambria"/>
                 <a:cs typeface="Cambria" pitchFamily="34" charset="-120"/>
               </a:rPr>
-              <a:t>Rebuild with AutoGen</a:t>
+              <a:t>Rebuild with </a:t>
+            </a:r>
+            <a:r>
+              <a:rPr lang="en-US" sz="1700" b="1">
+                <a:solidFill>
+                  <a:srgbClr val="065A82"/>
+                </a:solidFill>
+                <a:latin typeface="Cambria"/>
+                <a:ea typeface="Cambria"/>
+                <a:cs typeface="Cambria" pitchFamily="34" charset="-120"/>
+              </a:rPr>
+              <a:t>Agent </a:t>
+            </a:r>
+            <a:r>
+              <a:rPr lang="en-US" sz="1700" b="1" dirty="0">
+                <a:solidFill>
+                  <a:srgbClr val="065A82"/>
+                </a:solidFill>
+                <a:latin typeface="Cambria"/>
+                <a:ea typeface="Cambria"/>
+                <a:cs typeface="Cambria" pitchFamily="34" charset="-120"/>
+              </a:rPr>
+              <a:t>framework</a:t>
             </a:r>
             <a:endParaRPr lang="en-US" sz="1700" dirty="0"/>
           </a:p>
@@ -5180,21 +5362,33 @@
           <a:bodyPr wrap="square" lIns="0" tIns="0" rIns="0" bIns="0" rtlCol="0" anchor="t"/>
           <a:lstStyle/>
           <a:p>
-            <a:pPr indent="0" marL="0">
-              <a:buNone/>
-            </a:pPr>
             <a:r>
               <a:rPr lang="en-US" sz="1350" dirty="0">
                 <a:solidFill>
                   <a:srgbClr val="1A1A1A"/>
                 </a:solidFill>
-                <a:latin typeface="Calibri" pitchFamily="34" charset="0"/>
-                <a:ea typeface="Calibri" pitchFamily="34" charset="-122"/>
-                <a:cs typeface="Calibri" pitchFamily="34" charset="-120"/>
-              </a:rPr>
-              <a:t>Use a framework built specifically for multi-agent conversation instead of hand-written orchestration.</a:t>
-            </a:r>
-            <a:endParaRPr lang="en-US" sz="1350" dirty="0"/>
+                <a:latin typeface="Calibri"/>
+                <a:ea typeface="Calibri"/>
+                <a:cs typeface="Calibri"/>
+              </a:rPr>
+              <a:t>Use a framework built specifically for multi-agent conversation instead of orchestration in </a:t>
+            </a:r>
+            <a:r>
+              <a:rPr lang="en-US" sz="1350">
+                <a:solidFill>
+                  <a:srgbClr val="1A1A1A"/>
+                </a:solidFill>
+                <a:latin typeface="Calibri"/>
+                <a:ea typeface="Calibri"/>
+                <a:cs typeface="Calibri"/>
+              </a:rPr>
+              <a:t>the code.</a:t>
+            </a:r>
+            <a:endParaRPr lang="en-US" sz="1350" dirty="0">
+              <a:latin typeface="Calibri"/>
+              <a:ea typeface="Calibri"/>
+              <a:cs typeface="Calibri"/>
+            </a:endParaRPr>
           </a:p>
         </p:txBody>
       </p:sp>
@@ -5219,7 +5413,7 @@
           <a:bodyPr wrap="square" lIns="0" tIns="0" rIns="0" bIns="0" rtlCol="0" anchor="ctr"/>
           <a:lstStyle/>
           <a:p>
-            <a:pPr algn="r" indent="0" marL="0">
+            <a:pPr marL="0" indent="0" algn="r">
               <a:buNone/>
             </a:pPr>
             <a:r>
@@ -5538,4 +5732,299 @@
     </a:ext>
   </a:extLst>
 </a:theme>
+</file>
+
+<file path=ppt/theme/theme2.xml><?xml version="1.0" encoding="utf-8"?>
+<a:theme xmlns:a="http://schemas.openxmlformats.org/drawingml/2006/main" name="Office Theme">
+  <a:themeElements>
+    <a:clrScheme name="Office">
+      <a:dk1>
+        <a:sysClr val="windowText" lastClr="000000"/>
+      </a:dk1>
+      <a:lt1>
+        <a:sysClr val="window" lastClr="FFFFFF"/>
+      </a:lt1>
+      <a:dk2>
+        <a:srgbClr val="44546A"/>
+      </a:dk2>
+      <a:lt2>
+        <a:srgbClr val="E7E6E6"/>
+      </a:lt2>
+      <a:accent1>
+        <a:srgbClr val="4472C4"/>
+      </a:accent1>
+      <a:accent2>
+        <a:srgbClr val="ED7D31"/>
+      </a:accent2>
+      <a:accent3>
+        <a:srgbClr val="A5A5A5"/>
+      </a:accent3>
+      <a:accent4>
+        <a:srgbClr val="FFC000"/>
+      </a:accent4>
+      <a:accent5>
+        <a:srgbClr val="5B9BD5"/>
+      </a:accent5>
+      <a:accent6>
+        <a:srgbClr val="70AD47"/>
+      </a:accent6>
+      <a:hlink>
+        <a:srgbClr val="0563C1"/>
+      </a:hlink>
+      <a:folHlink>
+        <a:srgbClr val="954F72"/>
+      </a:folHlink>
+    </a:clrScheme>
+    <a:fontScheme name="Office">
+      <a:majorFont>
+        <a:latin typeface="Calibri Light" panose="020F0302020204030204"/>
+        <a:ea typeface=""/>
+        <a:cs typeface=""/>
+        <a:font script="Jpan" typeface="游ゴシック Light"/>
+        <a:font script="Hang" typeface="맑은 고딕"/>
+        <a:font script="Hans" typeface="等线 Light"/>
+        <a:font script="Hant" typeface="新細明體"/>
+        <a:font script="Arab" typeface="Times New Roman"/>
+        <a:font script="Hebr" typeface="Times New Roman"/>
+        <a:font script="Thai" typeface="Angsana New"/>
+        <a:font script="Ethi" typeface="Nyala"/>
+        <a:font script="Beng" typeface="Vrinda"/>
+        <a:font script="Gujr" typeface="Shruti"/>
+        <a:font script="Khmr" typeface="MoolBoran"/>
+        <a:font script="Knda" typeface="Tunga"/>
+        <a:font script="Guru" typeface="Raavi"/>
+        <a:font script="Cans" typeface="Euphemia"/>
+        <a:font script="Cher" typeface="Plantagenet Cherokee"/>
+        <a:font script="Yiii" typeface="Microsoft Yi Baiti"/>
+        <a:font script="Tibt" typeface="Microsoft Himalaya"/>
+        <a:font script="Thaa" typeface="MV Boli"/>
+        <a:font script="Deva" typeface="Mangal"/>
+        <a:font script="Telu" typeface="Gautami"/>
+        <a:font script="Taml" typeface="Latha"/>
+        <a:font script="Syrc" typeface="Estrangelo Edessa"/>
+        <a:font script="Orya" typeface="Kalinga"/>
+        <a:font script="Mlym" typeface="Kartika"/>
+        <a:font script="Laoo" typeface="DokChampa"/>
+        <a:font script="Sinh" typeface="Iskoola Pota"/>
+        <a:font script="Mong" typeface="Mongolian Baiti"/>
+        <a:font script="Viet" typeface="Times New Roman"/>
+        <a:font script="Uigh" typeface="Microsoft Uighur"/>
+        <a:font script="Geor" typeface="Sylfaen"/>
+        <a:font script="Armn" typeface="Arial"/>
+        <a:font script="Bugi" typeface="Leelawadee UI"/>
+        <a:font script="Bopo" typeface="Microsoft JhengHei"/>
+        <a:font script="Java" typeface="Javanese Text"/>
+        <a:font script="Lisu" typeface="Segoe UI"/>
+        <a:font script="Mymr" typeface="Myanmar Text"/>
+        <a:font script="Nkoo" typeface="Ebrima"/>
+        <a:font script="Olck" typeface="Nirmala UI"/>
+        <a:font script="Osma" typeface="Ebrima"/>
+        <a:font script="Phag" typeface="Phagspa"/>
+        <a:font script="Syrn" typeface="Estrangelo Edessa"/>
+        <a:font script="Syrj" typeface="Estrangelo Edessa"/>
+        <a:font script="Syre" typeface="Estrangelo Edessa"/>
+        <a:font script="Sora" typeface="Nirmala UI"/>
+        <a:font script="Tale" typeface="Microsoft Tai Le"/>
+        <a:font script="Talu" typeface="Microsoft New Tai Lue"/>
+        <a:font script="Tfng" typeface="Ebrima"/>
+      </a:majorFont>
+      <a:minorFont>
+        <a:latin typeface="Calibri" panose="020F0502020204030204"/>
+        <a:ea typeface=""/>
+        <a:cs typeface=""/>
+        <a:font script="Jpan" typeface="游ゴシック"/>
+        <a:font script="Hang" typeface="맑은 고딕"/>
+        <a:font script="Hans" typeface="等线"/>
+        <a:font script="Hant" typeface="新細明體"/>
+        <a:font script="Arab" typeface="Arial"/>
+        <a:font script="Hebr" typeface="Arial"/>
+        <a:font script="Thai" typeface="Cordia New"/>
+        <a:font script="Ethi" typeface="Nyala"/>
+        <a:font script="Beng" typeface="Vrinda"/>
+        <a:font script="Gujr" typeface="Shruti"/>
+        <a:font script="Khmr" typeface="DaunPenh"/>
+        <a:font script="Knda" typeface="Tunga"/>
+        <a:font script="Guru" typeface="Raavi"/>
+        <a:font script="Cans" typeface="Euphemia"/>
+        <a:font script="Cher" typeface="Plantagenet Cherokee"/>
+        <a:font script="Yiii" typeface="Microsoft Yi Baiti"/>
+        <a:font script="Tibt" typeface="Microsoft Himalaya"/>
+        <a:font script="Thaa" typeface="MV Boli"/>
+        <a:font script="Deva" typeface="Mangal"/>
+        <a:font script="Telu" typeface="Gautami"/>
+        <a:font script="Taml" typeface="Latha"/>
+        <a:font script="Syrc" typeface="Estrangelo Edessa"/>
+        <a:font script="Orya" typeface="Kalinga"/>
+        <a:font script="Mlym" typeface="Kartika"/>
+        <a:font script="Laoo" typeface="DokChampa"/>
+        <a:font script="Sinh" typeface="Iskoola Pota"/>
+        <a:font script="Mong" typeface="Mongolian Baiti"/>
+        <a:font script="Viet" typeface="Arial"/>
+        <a:font script="Uigh" typeface="Microsoft Uighur"/>
+        <a:font script="Geor" typeface="Sylfaen"/>
+        <a:font script="Armn" typeface="Arial"/>
+        <a:font script="Bugi" typeface="Leelawadee UI"/>
+        <a:font script="Bopo" typeface="Microsoft JhengHei"/>
+        <a:font script="Java" typeface="Javanese Text"/>
+        <a:font script="Lisu" typeface="Segoe UI"/>
+        <a:font script="Mymr" typeface="Myanmar Text"/>
+        <a:font script="Nkoo" typeface="Ebrima"/>
+        <a:font script="Olck" typeface="Nirmala UI"/>
+        <a:font script="Osma" typeface="Ebrima"/>
+        <a:font script="Phag" typeface="Phagspa"/>
+        <a:font script="Syrn" typeface="Estrangelo Edessa"/>
+        <a:font script="Syrj" typeface="Estrangelo Edessa"/>
+        <a:font script="Syre" typeface="Estrangelo Edessa"/>
+        <a:font script="Sora" typeface="Nirmala UI"/>
+        <a:font script="Tale" typeface="Microsoft Tai Le"/>
+        <a:font script="Talu" typeface="Microsoft New Tai Lue"/>
+        <a:font script="Tfng" typeface="Ebrima"/>
+      </a:minorFont>
+    </a:fontScheme>
+    <a:fmtScheme name="Office">
+      <a:fillStyleLst>
+        <a:solidFill>
+          <a:schemeClr val="phClr"/>
+        </a:solidFill>
+        <a:gradFill rotWithShape="1">
+          <a:gsLst>
+            <a:gs pos="0">
+              <a:schemeClr val="phClr">
+                <a:lumMod val="110000"/>
+                <a:satMod val="105000"/>
+                <a:tint val="67000"/>
+              </a:schemeClr>
+            </a:gs>
+            <a:gs pos="50000">
+              <a:schemeClr val="phClr">
+                <a:lumMod val="105000"/>
+                <a:satMod val="103000"/>
+                <a:tint val="73000"/>
+              </a:schemeClr>
+            </a:gs>
+            <a:gs pos="100000">
+              <a:schemeClr val="phClr">
+                <a:lumMod val="105000"/>
+                <a:satMod val="109000"/>
+                <a:tint val="81000"/>
+              </a:schemeClr>
+            </a:gs>
+          </a:gsLst>
+          <a:lin ang="5400000" scaled="0"/>
+        </a:gradFill>
+        <a:gradFill rotWithShape="1">
+          <a:gsLst>
+            <a:gs pos="0">
+              <a:schemeClr val="phClr">
+                <a:satMod val="103000"/>
+                <a:lumMod val="102000"/>
+                <a:tint val="94000"/>
+              </a:schemeClr>
+            </a:gs>
+            <a:gs pos="50000">
+              <a:schemeClr val="phClr">
+                <a:satMod val="110000"/>
+                <a:lumMod val="100000"/>
+                <a:shade val="100000"/>
+              </a:schemeClr>
+            </a:gs>
+            <a:gs pos="100000">
+              <a:schemeClr val="phClr">
+                <a:lumMod val="99000"/>
+                <a:satMod val="120000"/>
+                <a:shade val="78000"/>
+              </a:schemeClr>
+            </a:gs>
+          </a:gsLst>
+          <a:lin ang="5400000" scaled="0"/>
+        </a:gradFill>
+      </a:fillStyleLst>
+      <a:lnStyleLst>
+        <a:ln w="6350" cap="flat" cmpd="sng" algn="ctr">
+          <a:solidFill>
+            <a:schemeClr val="phClr"/>
+          </a:solidFill>
+          <a:prstDash val="solid"/>
+          <a:miter lim="800000"/>
+        </a:ln>
+        <a:ln w="12700" cap="flat" cmpd="sng" algn="ctr">
+          <a:solidFill>
+            <a:schemeClr val="phClr"/>
+          </a:solidFill>
+          <a:prstDash val="solid"/>
+          <a:miter lim="800000"/>
+        </a:ln>
+        <a:ln w="19050" cap="flat" cmpd="sng" algn="ctr">
+          <a:solidFill>
+            <a:schemeClr val="phClr"/>
+          </a:solidFill>
+          <a:prstDash val="solid"/>
+          <a:miter lim="800000"/>
+        </a:ln>
+      </a:lnStyleLst>
+      <a:effectStyleLst>
+        <a:effectStyle>
+          <a:effectLst/>
+        </a:effectStyle>
+        <a:effectStyle>
+          <a:effectLst/>
+        </a:effectStyle>
+        <a:effectStyle>
+          <a:effectLst>
+            <a:outerShdw blurRad="57150" dist="19050" dir="5400000" algn="ctr" rotWithShape="0">
+              <a:srgbClr val="000000">
+                <a:alpha val="63000"/>
+              </a:srgbClr>
+            </a:outerShdw>
+          </a:effectLst>
+        </a:effectStyle>
+      </a:effectStyleLst>
+      <a:bgFillStyleLst>
+        <a:solidFill>
+          <a:schemeClr val="phClr"/>
+        </a:solidFill>
+        <a:solidFill>
+          <a:schemeClr val="phClr">
+            <a:tint val="95000"/>
+            <a:satMod val="170000"/>
+          </a:schemeClr>
+        </a:solidFill>
+        <a:gradFill rotWithShape="1">
+          <a:gsLst>
+            <a:gs pos="0">
+              <a:schemeClr val="phClr">
+                <a:tint val="93000"/>
+                <a:satMod val="150000"/>
+                <a:shade val="98000"/>
+                <a:lumMod val="102000"/>
+              </a:schemeClr>
+            </a:gs>
+            <a:gs pos="50000">
+              <a:schemeClr val="phClr">
+                <a:tint val="98000"/>
+                <a:satMod val="130000"/>
+                <a:shade val="90000"/>
+                <a:lumMod val="103000"/>
+              </a:schemeClr>
+            </a:gs>
+            <a:gs pos="100000">
+              <a:schemeClr val="phClr">
+                <a:shade val="63000"/>
+                <a:satMod val="120000"/>
+              </a:schemeClr>
+            </a:gs>
+          </a:gsLst>
+          <a:lin ang="5400000" scaled="0"/>
+        </a:gradFill>
+      </a:bgFillStyleLst>
+    </a:fmtScheme>
+  </a:themeElements>
+  <a:objectDefaults/>
+  <a:extraClrSchemeLst/>
+  <a:extLst>
+    <a:ext uri="{05A4C25C-085E-4340-85A3-A5531E510DB2}">
+      <thm15:themeFamily xmlns:thm15="http://schemas.microsoft.com/office/thememl/2012/main" name="Office Theme" id="{62F939B6-93AF-4DB8-9C6B-D6C7DFDC589F}" vid="{4A3C46E8-61CC-4603-A589-7422A47A8E4A}"/>
+    </a:ext>
+  </a:extLst>
+</a:theme>
 </file>